--- a/assets/LLR_Trinity_Peer_Support_Discussion.pptx
+++ b/assets/LLR_Trinity_Peer_Support_Discussion.pptx
@@ -3185,6 +3185,30 @@
           </a:p>
         </p:txBody>
       </p:sp>
+      <p:pic>
+        <p:nvPicPr>
+          <p:cNvPr id="4" name="Picture 3" descr="logo-nobg.png"/>
+          <p:cNvPicPr>
+            <a:picLocks noChangeAspect="1"/>
+          </p:cNvPicPr>
+          <p:nvPr/>
+        </p:nvPicPr>
+        <p:blipFill>
+          <a:blip r:embed="rId2"/>
+          <a:stretch>
+            <a:fillRect/>
+          </a:stretch>
+        </p:blipFill>
+        <p:spPr>
+          <a:xfrm>
+            <a:off x="365760" y="274320"/>
+            <a:ext cx="1005840" cy="1005840"/>
+          </a:xfrm>
+          <a:prstGeom prst="rect">
+            <a:avLst/>
+          </a:prstGeom>
+        </p:spPr>
+      </p:pic>
     </p:spTree>
   </p:cSld>
   <p:clrMapOvr>
@@ -3323,6 +3347,30 @@
           </a:p>
         </p:txBody>
       </p:sp>
+      <p:pic>
+        <p:nvPicPr>
+          <p:cNvPr id="4" name="Picture 3" descr="logo-nobg.png"/>
+          <p:cNvPicPr>
+            <a:picLocks noChangeAspect="1"/>
+          </p:cNvPicPr>
+          <p:nvPr/>
+        </p:nvPicPr>
+        <p:blipFill>
+          <a:blip r:embed="rId2"/>
+          <a:stretch>
+            <a:fillRect/>
+          </a:stretch>
+        </p:blipFill>
+        <p:spPr>
+          <a:xfrm>
+            <a:off x="11414455" y="6217920"/>
+            <a:ext cx="502920" cy="502920"/>
+          </a:xfrm>
+          <a:prstGeom prst="rect">
+            <a:avLst/>
+          </a:prstGeom>
+        </p:spPr>
+      </p:pic>
     </p:spTree>
   </p:cSld>
   <p:clrMapOvr>
@@ -3428,6 +3476,30 @@
           </a:p>
         </p:txBody>
       </p:sp>
+      <p:pic>
+        <p:nvPicPr>
+          <p:cNvPr id="4" name="Picture 3" descr="logo-nobg.png"/>
+          <p:cNvPicPr>
+            <a:picLocks noChangeAspect="1"/>
+          </p:cNvPicPr>
+          <p:nvPr/>
+        </p:nvPicPr>
+        <p:blipFill>
+          <a:blip r:embed="rId2"/>
+          <a:stretch>
+            <a:fillRect/>
+          </a:stretch>
+        </p:blipFill>
+        <p:spPr>
+          <a:xfrm>
+            <a:off x="11414455" y="6217920"/>
+            <a:ext cx="502920" cy="502920"/>
+          </a:xfrm>
+          <a:prstGeom prst="rect">
+            <a:avLst/>
+          </a:prstGeom>
+        </p:spPr>
+      </p:pic>
     </p:spTree>
   </p:cSld>
   <p:clrMapOvr>
@@ -3544,6 +3616,30 @@
           </a:p>
         </p:txBody>
       </p:sp>
+      <p:pic>
+        <p:nvPicPr>
+          <p:cNvPr id="4" name="Picture 3" descr="logo-nobg.png"/>
+          <p:cNvPicPr>
+            <a:picLocks noChangeAspect="1"/>
+          </p:cNvPicPr>
+          <p:nvPr/>
+        </p:nvPicPr>
+        <p:blipFill>
+          <a:blip r:embed="rId2"/>
+          <a:stretch>
+            <a:fillRect/>
+          </a:stretch>
+        </p:blipFill>
+        <p:spPr>
+          <a:xfrm>
+            <a:off x="11414455" y="6217920"/>
+            <a:ext cx="502920" cy="502920"/>
+          </a:xfrm>
+          <a:prstGeom prst="rect">
+            <a:avLst/>
+          </a:prstGeom>
+        </p:spPr>
+      </p:pic>
     </p:spTree>
   </p:cSld>
   <p:clrMapOvr>
@@ -3682,6 +3778,30 @@
           </a:p>
         </p:txBody>
       </p:sp>
+      <p:pic>
+        <p:nvPicPr>
+          <p:cNvPr id="4" name="Picture 3" descr="logo-nobg.png"/>
+          <p:cNvPicPr>
+            <a:picLocks noChangeAspect="1"/>
+          </p:cNvPicPr>
+          <p:nvPr/>
+        </p:nvPicPr>
+        <p:blipFill>
+          <a:blip r:embed="rId2"/>
+          <a:stretch>
+            <a:fillRect/>
+          </a:stretch>
+        </p:blipFill>
+        <p:spPr>
+          <a:xfrm>
+            <a:off x="11414455" y="6217920"/>
+            <a:ext cx="502920" cy="502920"/>
+          </a:xfrm>
+          <a:prstGeom prst="rect">
+            <a:avLst/>
+          </a:prstGeom>
+        </p:spPr>
+      </p:pic>
     </p:spTree>
   </p:cSld>
   <p:clrMapOvr>
@@ -3820,6 +3940,30 @@
           </a:p>
         </p:txBody>
       </p:sp>
+      <p:pic>
+        <p:nvPicPr>
+          <p:cNvPr id="4" name="Picture 3" descr="logo-nobg.png"/>
+          <p:cNvPicPr>
+            <a:picLocks noChangeAspect="1"/>
+          </p:cNvPicPr>
+          <p:nvPr/>
+        </p:nvPicPr>
+        <p:blipFill>
+          <a:blip r:embed="rId2"/>
+          <a:stretch>
+            <a:fillRect/>
+          </a:stretch>
+        </p:blipFill>
+        <p:spPr>
+          <a:xfrm>
+            <a:off x="11414455" y="6217920"/>
+            <a:ext cx="502920" cy="502920"/>
+          </a:xfrm>
+          <a:prstGeom prst="rect">
+            <a:avLst/>
+          </a:prstGeom>
+        </p:spPr>
+      </p:pic>
     </p:spTree>
   </p:cSld>
   <p:clrMapOvr>
@@ -3925,6 +4069,30 @@
           </a:p>
         </p:txBody>
       </p:sp>
+      <p:pic>
+        <p:nvPicPr>
+          <p:cNvPr id="4" name="Picture 3" descr="logo-nobg.png"/>
+          <p:cNvPicPr>
+            <a:picLocks noChangeAspect="1"/>
+          </p:cNvPicPr>
+          <p:nvPr/>
+        </p:nvPicPr>
+        <p:blipFill>
+          <a:blip r:embed="rId2"/>
+          <a:stretch>
+            <a:fillRect/>
+          </a:stretch>
+        </p:blipFill>
+        <p:spPr>
+          <a:xfrm>
+            <a:off x="11414455" y="6217920"/>
+            <a:ext cx="502920" cy="502920"/>
+          </a:xfrm>
+          <a:prstGeom prst="rect">
+            <a:avLst/>
+          </a:prstGeom>
+        </p:spPr>
+      </p:pic>
     </p:spTree>
   </p:cSld>
   <p:clrMapOvr>
@@ -4063,6 +4231,30 @@
           </a:p>
         </p:txBody>
       </p:sp>
+      <p:pic>
+        <p:nvPicPr>
+          <p:cNvPr id="4" name="Picture 3" descr="logo-nobg.png"/>
+          <p:cNvPicPr>
+            <a:picLocks noChangeAspect="1"/>
+          </p:cNvPicPr>
+          <p:nvPr/>
+        </p:nvPicPr>
+        <p:blipFill>
+          <a:blip r:embed="rId2"/>
+          <a:stretch>
+            <a:fillRect/>
+          </a:stretch>
+        </p:blipFill>
+        <p:spPr>
+          <a:xfrm>
+            <a:off x="11414455" y="6217920"/>
+            <a:ext cx="502920" cy="502920"/>
+          </a:xfrm>
+          <a:prstGeom prst="rect">
+            <a:avLst/>
+          </a:prstGeom>
+        </p:spPr>
+      </p:pic>
     </p:spTree>
   </p:cSld>
   <p:clrMapOvr>
@@ -4190,6 +4382,30 @@
           </a:p>
         </p:txBody>
       </p:sp>
+      <p:pic>
+        <p:nvPicPr>
+          <p:cNvPr id="4" name="Picture 3" descr="logo-nobg.png"/>
+          <p:cNvPicPr>
+            <a:picLocks noChangeAspect="1"/>
+          </p:cNvPicPr>
+          <p:nvPr/>
+        </p:nvPicPr>
+        <p:blipFill>
+          <a:blip r:embed="rId2"/>
+          <a:stretch>
+            <a:fillRect/>
+          </a:stretch>
+        </p:blipFill>
+        <p:spPr>
+          <a:xfrm>
+            <a:off x="11414455" y="6217920"/>
+            <a:ext cx="502920" cy="502920"/>
+          </a:xfrm>
+          <a:prstGeom prst="rect">
+            <a:avLst/>
+          </a:prstGeom>
+        </p:spPr>
+      </p:pic>
     </p:spTree>
   </p:cSld>
   <p:clrMapOvr>
@@ -4317,6 +4533,30 @@
           </a:p>
         </p:txBody>
       </p:sp>
+      <p:pic>
+        <p:nvPicPr>
+          <p:cNvPr id="4" name="Picture 3" descr="logo-nobg.png"/>
+          <p:cNvPicPr>
+            <a:picLocks noChangeAspect="1"/>
+          </p:cNvPicPr>
+          <p:nvPr/>
+        </p:nvPicPr>
+        <p:blipFill>
+          <a:blip r:embed="rId2"/>
+          <a:stretch>
+            <a:fillRect/>
+          </a:stretch>
+        </p:blipFill>
+        <p:spPr>
+          <a:xfrm>
+            <a:off x="11414455" y="6217920"/>
+            <a:ext cx="502920" cy="502920"/>
+          </a:xfrm>
+          <a:prstGeom prst="rect">
+            <a:avLst/>
+          </a:prstGeom>
+        </p:spPr>
+      </p:pic>
     </p:spTree>
   </p:cSld>
   <p:clrMapOvr>
@@ -4466,6 +4706,30 @@
           </a:p>
         </p:txBody>
       </p:sp>
+      <p:pic>
+        <p:nvPicPr>
+          <p:cNvPr id="4" name="Picture 3" descr="logo-nobg.png"/>
+          <p:cNvPicPr>
+            <a:picLocks noChangeAspect="1"/>
+          </p:cNvPicPr>
+          <p:nvPr/>
+        </p:nvPicPr>
+        <p:blipFill>
+          <a:blip r:embed="rId2"/>
+          <a:stretch>
+            <a:fillRect/>
+          </a:stretch>
+        </p:blipFill>
+        <p:spPr>
+          <a:xfrm>
+            <a:off x="11414455" y="6217920"/>
+            <a:ext cx="502920" cy="502920"/>
+          </a:xfrm>
+          <a:prstGeom prst="rect">
+            <a:avLst/>
+          </a:prstGeom>
+        </p:spPr>
+      </p:pic>
     </p:spTree>
   </p:cSld>
   <p:clrMapOvr>
